--- a/dataset/guides_final/ACS/guide/IT-ACS-003_퇴사·부서이동 권한 변경 가이드.pptx
+++ b/dataset/guides_final/ACS/guide/IT-ACS-003_퇴사·부서이동 권한 변경 가이드.pptx
@@ -3240,7 +3240,7 @@
                 <a:ea typeface="Malgun Gothic"/>
                 <a:cs typeface="Malgun Gothic"/>
               </a:rPr>
-              <a:t>한화시스템 ICT 임직원 IT 안내 · 접근권한</a:t>
+              <a:t>가상 ICT 기업 임직원 IT 안내 · 접근권한</a:t>
             </a:r>
           </a:p>
         </p:txBody>
@@ -3472,7 +3472,7 @@
                 <a:ea typeface="Malgun Gothic"/>
                 <a:cs typeface="Malgun Gothic"/>
               </a:rPr>
-              <a:t>© HANWHA SYSTEMS ICT · IT-ACS-003 · 사내 일반</a:t>
+              <a:t>© 가상 ICT 기업 · IT-ACS-003 · 사내 일반</a:t>
             </a:r>
           </a:p>
         </p:txBody>
@@ -5446,7 +5446,7 @@
                 <a:ea typeface="Malgun Gothic"/>
                 <a:cs typeface="Malgun Gothic"/>
               </a:rPr>
-              <a:t>© HANWHA SYSTEMS ICT · IT-ACS-003 · 사내 일반</a:t>
+              <a:t>© 가상 ICT 기업 · IT-ACS-003 · 사내 일반</a:t>
             </a:r>
           </a:p>
         </p:txBody>
@@ -7230,7 +7230,7 @@
                 <a:ea typeface="Malgun Gothic"/>
                 <a:cs typeface="Malgun Gothic"/>
               </a:rPr>
-              <a:t>© HANWHA SYSTEMS ICT · IT-ACS-003 · 사내 일반</a:t>
+              <a:t>© 가상 ICT 기업 · IT-ACS-003 · 사내 일반</a:t>
             </a:r>
           </a:p>
         </p:txBody>
@@ -9264,7 +9264,7 @@
                 <a:ea typeface="Malgun Gothic"/>
                 <a:cs typeface="Malgun Gothic"/>
               </a:rPr>
-              <a:t>© HANWHA SYSTEMS ICT · IT-ACS-003 · 사내 일반</a:t>
+              <a:t>© 가상 ICT 기업 · IT-ACS-003 · 사내 일반</a:t>
             </a:r>
           </a:p>
         </p:txBody>
@@ -11119,7 +11119,7 @@
                 <a:ea typeface="Malgun Gothic"/>
                 <a:cs typeface="Malgun Gothic"/>
               </a:rPr>
-              <a:t>© HANWHA SYSTEMS ICT · IT-ACS-003 · 사내 일반</a:t>
+              <a:t>© 가상 ICT 기업 · IT-ACS-003 · 사내 일반</a:t>
             </a:r>
           </a:p>
         </p:txBody>
@@ -12527,7 +12527,7 @@
                 <a:ea typeface="Malgun Gothic"/>
                 <a:cs typeface="Malgun Gothic"/>
               </a:rPr>
-              <a:t>© HANWHA SYSTEMS ICT · IT-ACS-003 · 사내 일반</a:t>
+              <a:t>© 가상 ICT 기업 · IT-ACS-003 · 사내 일반</a:t>
             </a:r>
           </a:p>
         </p:txBody>
@@ -14265,7 +14265,7 @@
                 <a:ea typeface="Malgun Gothic"/>
                 <a:cs typeface="Malgun Gothic"/>
               </a:rPr>
-              <a:t>© HANWHA SYSTEMS ICT · IT-ACS-003 · 사내 일반</a:t>
+              <a:t>© 가상 ICT 기업 · IT-ACS-003 · 사내 일반</a:t>
             </a:r>
           </a:p>
         </p:txBody>
@@ -15673,7 +15673,7 @@
                 <a:ea typeface="Malgun Gothic"/>
                 <a:cs typeface="Malgun Gothic"/>
               </a:rPr>
-              <a:t>© HANWHA SYSTEMS ICT · IT-ACS-003 · 사내 일반</a:t>
+              <a:t>© 가상 ICT 기업 · IT-ACS-003 · 사내 일반</a:t>
             </a:r>
           </a:p>
         </p:txBody>
@@ -17983,7 +17983,7 @@
                 <a:ea typeface="Malgun Gothic"/>
                 <a:cs typeface="Malgun Gothic"/>
               </a:rPr>
-              <a:t>© HANWHA SYSTEMS ICT · IT-ACS-003 · 사내 일반</a:t>
+              <a:t>© 가상 ICT 기업 · IT-ACS-003 · 사내 일반</a:t>
             </a:r>
           </a:p>
         </p:txBody>
@@ -20151,7 +20151,7 @@
                 <a:ea typeface="Malgun Gothic"/>
                 <a:cs typeface="Malgun Gothic"/>
               </a:rPr>
-              <a:t>© HANWHA SYSTEMS ICT · IT-ACS-003 · 사내 일반</a:t>
+              <a:t>© 가상 ICT 기업 · IT-ACS-003 · 사내 일반</a:t>
             </a:r>
           </a:p>
         </p:txBody>
@@ -20399,7 +20399,7 @@
                 <a:ea typeface="Malgun Gothic"/>
                 <a:cs typeface="Malgun Gothic"/>
               </a:rPr>
-              <a:t>© HANWHA SYSTEMS ICT · IT-ACS-003 · 사내 일반</a:t>
+              <a:t>© 가상 ICT 기업 · IT-ACS-003 · 사내 일반</a:t>
             </a:r>
           </a:p>
         </p:txBody>
@@ -22180,7 +22180,7 @@
                 <a:ea typeface="Malgun Gothic"/>
                 <a:cs typeface="Malgun Gothic"/>
               </a:rPr>
-              <a:t>© HANWHA SYSTEMS ICT · IT-ACS-003 · 사내 일반</a:t>
+              <a:t>© 가상 ICT 기업 · IT-ACS-003 · 사내 일반</a:t>
             </a:r>
           </a:p>
         </p:txBody>
@@ -23009,7 +23009,7 @@
                 <a:ea typeface="Malgun Gothic"/>
                 <a:cs typeface="Malgun Gothic"/>
               </a:rPr>
-              <a:t>© HANWHA SYSTEMS ICT · IT-ACS-003 · 사내 일반</a:t>
+              <a:t>© 가상 ICT 기업 · IT-ACS-003 · 사내 일반</a:t>
             </a:r>
           </a:p>
         </p:txBody>
@@ -23257,7 +23257,7 @@
                 <a:ea typeface="Malgun Gothic"/>
                 <a:cs typeface="Malgun Gothic"/>
               </a:rPr>
-              <a:t>© HANWHA SYSTEMS ICT · IT-ACS-003 · 사내 일반</a:t>
+              <a:t>© 가상 ICT 기업 · IT-ACS-003 · 사내 일반</a:t>
             </a:r>
           </a:p>
         </p:txBody>
@@ -23890,7 +23890,7 @@
                 <a:ea typeface="Malgun Gothic"/>
                 <a:cs typeface="Malgun Gothic"/>
               </a:rPr>
-              <a:t>© HANWHA SYSTEMS ICT · IT-ACS-003 · 사내 일반</a:t>
+              <a:t>© 가상 ICT 기업 · IT-ACS-003 · 사내 일반</a:t>
             </a:r>
           </a:p>
         </p:txBody>
@@ -24138,7 +24138,7 @@
                 <a:ea typeface="Malgun Gothic"/>
                 <a:cs typeface="Malgun Gothic"/>
               </a:rPr>
-              <a:t>© HANWHA SYSTEMS ICT · IT-ACS-003 · 사내 일반</a:t>
+              <a:t>© 가상 ICT 기업 · IT-ACS-003 · 사내 일반</a:t>
             </a:r>
           </a:p>
         </p:txBody>
@@ -24650,7 +24650,7 @@
                           <a:ea typeface="Malgun Gothic"/>
                           <a:cs typeface="Malgun Gothic"/>
                         </a:rPr>
-                        <a:t>사내 IT 포털(hanwha-admin) 상단 [챗봇 문의]</a:t>
+                        <a:t>사내 IT 포털 상단 [챗봇 문의]</a:t>
                       </a:r>
                     </a:p>
                   </a:txBody>
@@ -25342,7 +25342,7 @@
                           <a:ea typeface="Malgun Gothic"/>
                           <a:cs typeface="Malgun Gothic"/>
                         </a:rPr>
-                        <a:t>it-helpdesk@hanwha-ict.example</a:t>
+                        <a:t>it-helpdesk@ict.example</a:t>
                       </a:r>
                     </a:p>
                   </a:txBody>
@@ -25641,7 +25641,7 @@
                 <a:ea typeface="Malgun Gothic"/>
                 <a:cs typeface="Malgun Gothic"/>
               </a:rPr>
-              <a:t>© HANWHA SYSTEMS ICT · IT-ACS-003 · 사내 일반</a:t>
+              <a:t>© 가상 ICT 기업 · IT-ACS-003 · 사내 일반</a:t>
             </a:r>
           </a:p>
         </p:txBody>
@@ -25889,7 +25889,7 @@
                 <a:ea typeface="Malgun Gothic"/>
                 <a:cs typeface="Malgun Gothic"/>
               </a:rPr>
-              <a:t>© HANWHA SYSTEMS ICT · IT-ACS-003 · 사내 일반</a:t>
+              <a:t>© 가상 ICT 기업 · IT-ACS-003 · 사내 일반</a:t>
             </a:r>
           </a:p>
         </p:txBody>
@@ -28382,7 +28382,7 @@
                 <a:ea typeface="Malgun Gothic"/>
                 <a:cs typeface="Malgun Gothic"/>
               </a:rPr>
-              <a:t>© HANWHA SYSTEMS ICT · IT-ACS-003 · 사내 일반</a:t>
+              <a:t>© 가상 ICT 기업 · IT-ACS-003 · 사내 일반</a:t>
             </a:r>
           </a:p>
         </p:txBody>
@@ -29359,7 +29359,7 @@
                 <a:ea typeface="Malgun Gothic"/>
                 <a:cs typeface="Malgun Gothic"/>
               </a:rPr>
-              <a:t>© HANWHA SYSTEMS ICT · IT-ACS-003 · 사내 일반</a:t>
+              <a:t>© 가상 ICT 기업 · IT-ACS-003 · 사내 일반</a:t>
             </a:r>
           </a:p>
         </p:txBody>
@@ -30635,7 +30635,7 @@
                 <a:ea typeface="Malgun Gothic"/>
                 <a:cs typeface="Malgun Gothic"/>
               </a:rPr>
-              <a:t>© HANWHA SYSTEMS ICT · IT-ACS-003 · 사내 일반</a:t>
+              <a:t>© 가상 ICT 기업 · IT-ACS-003 · 사내 일반</a:t>
             </a:r>
           </a:p>
         </p:txBody>
@@ -30883,7 +30883,7 @@
                 <a:ea typeface="Malgun Gothic"/>
                 <a:cs typeface="Malgun Gothic"/>
               </a:rPr>
-              <a:t>© HANWHA SYSTEMS ICT · IT-ACS-003 · 사내 일반</a:t>
+              <a:t>© 가상 ICT 기업 · IT-ACS-003 · 사내 일반</a:t>
             </a:r>
           </a:p>
         </p:txBody>
@@ -32225,7 +32225,7 @@
                 <a:ea typeface="Malgun Gothic"/>
                 <a:cs typeface="Malgun Gothic"/>
               </a:rPr>
-              <a:t>© HANWHA SYSTEMS ICT · IT-ACS-003 · 사내 일반</a:t>
+              <a:t>© 가상 ICT 기업 · IT-ACS-003 · 사내 일반</a:t>
             </a:r>
           </a:p>
         </p:txBody>
@@ -32473,7 +32473,7 @@
                 <a:ea typeface="Malgun Gothic"/>
                 <a:cs typeface="Malgun Gothic"/>
               </a:rPr>
-              <a:t>© HANWHA SYSTEMS ICT · IT-ACS-003 · 사내 일반</a:t>
+              <a:t>© 가상 ICT 기업 · IT-ACS-003 · 사내 일반</a:t>
             </a:r>
           </a:p>
         </p:txBody>
@@ -33478,7 +33478,7 @@
                 <a:ea typeface="Malgun Gothic"/>
                 <a:cs typeface="Malgun Gothic"/>
               </a:rPr>
-              <a:t>© HANWHA SYSTEMS ICT · IT-ACS-003 · 사내 일반</a:t>
+              <a:t>© 가상 ICT 기업 · IT-ACS-003 · 사내 일반</a:t>
             </a:r>
           </a:p>
         </p:txBody>
@@ -35338,7 +35338,7 @@
                 <a:ea typeface="Malgun Gothic"/>
                 <a:cs typeface="Malgun Gothic"/>
               </a:rPr>
-              <a:t>© HANWHA SYSTEMS ICT · IT-ACS-003 · 사내 일반</a:t>
+              <a:t>© 가상 ICT 기업 · IT-ACS-003 · 사내 일반</a:t>
             </a:r>
           </a:p>
         </p:txBody>
@@ -35586,7 +35586,7 @@
                 <a:ea typeface="Malgun Gothic"/>
                 <a:cs typeface="Malgun Gothic"/>
               </a:rPr>
-              <a:t>© HANWHA SYSTEMS ICT · IT-ACS-003 · 사내 일반</a:t>
+              <a:t>© 가상 ICT 기업 · IT-ACS-003 · 사내 일반</a:t>
             </a:r>
           </a:p>
         </p:txBody>
